--- a/賜福與你(崇拜版).pptx
+++ b/賜福與你(崇拜版).pptx
@@ -164,10 +164,9 @@
           <a:lstStyle/>
           <a:p>
             <a:r>
-              <a:rPr lang="zh-TW" altLang="en-US" smtClean="0"/>
+              <a:rPr lang="zh-TW" altLang="en-US"/>
               <a:t>按一下以編輯母片標題樣式</a:t>
             </a:r>
-            <a:endParaRPr lang="zh-TW" altLang="en-US"/>
           </a:p>
         </p:txBody>
       </p:sp>
@@ -283,10 +282,9 @@
           </a:lstStyle>
           <a:p>
             <a:r>
-              <a:rPr lang="zh-TW" altLang="en-US" smtClean="0"/>
+              <a:rPr lang="zh-TW" altLang="en-US"/>
               <a:t>按一下以編輯母片副標題樣式</a:t>
             </a:r>
-            <a:endParaRPr lang="zh-TW" altLang="en-US"/>
           </a:p>
         </p:txBody>
       </p:sp>
@@ -307,7 +305,7 @@
           <a:p>
             <a:fld id="{DB277880-5CE5-494A-B90A-3AAA4EE77FE9}" type="datetimeFigureOut">
               <a:rPr lang="zh-TW" altLang="en-US" smtClean="0"/>
-              <a:t>2023/1/21</a:t>
+              <a:t>2025/2/7</a:t>
             </a:fld>
             <a:endParaRPr lang="zh-TW" altLang="en-US"/>
           </a:p>
@@ -396,10 +394,9 @@
           <a:lstStyle/>
           <a:p>
             <a:r>
-              <a:rPr lang="zh-TW" altLang="en-US" smtClean="0"/>
+              <a:rPr lang="zh-TW" altLang="en-US"/>
               <a:t>按一下以編輯母片標題樣式</a:t>
             </a:r>
-            <a:endParaRPr lang="zh-TW" altLang="en-US"/>
           </a:p>
         </p:txBody>
       </p:sp>
@@ -420,38 +417,37 @@
           <a:p>
             <a:pPr lvl="0"/>
             <a:r>
-              <a:rPr lang="zh-TW" altLang="en-US" smtClean="0"/>
+              <a:rPr lang="zh-TW" altLang="en-US"/>
               <a:t>按一下以編輯母片文字樣式</a:t>
             </a:r>
           </a:p>
           <a:p>
             <a:pPr lvl="1"/>
             <a:r>
-              <a:rPr lang="zh-TW" altLang="en-US" smtClean="0"/>
+              <a:rPr lang="zh-TW" altLang="en-US"/>
               <a:t>第二層</a:t>
             </a:r>
           </a:p>
           <a:p>
             <a:pPr lvl="2"/>
             <a:r>
-              <a:rPr lang="zh-TW" altLang="en-US" smtClean="0"/>
+              <a:rPr lang="zh-TW" altLang="en-US"/>
               <a:t>第三層</a:t>
             </a:r>
           </a:p>
           <a:p>
             <a:pPr lvl="3"/>
             <a:r>
-              <a:rPr lang="zh-TW" altLang="en-US" smtClean="0"/>
+              <a:rPr lang="zh-TW" altLang="en-US"/>
               <a:t>第四層</a:t>
             </a:r>
           </a:p>
           <a:p>
             <a:pPr lvl="4"/>
             <a:r>
-              <a:rPr lang="zh-TW" altLang="en-US" smtClean="0"/>
+              <a:rPr lang="zh-TW" altLang="en-US"/>
               <a:t>第五層</a:t>
             </a:r>
-            <a:endParaRPr lang="zh-TW" altLang="en-US"/>
           </a:p>
         </p:txBody>
       </p:sp>
@@ -472,7 +468,7 @@
           <a:p>
             <a:fld id="{DB277880-5CE5-494A-B90A-3AAA4EE77FE9}" type="datetimeFigureOut">
               <a:rPr lang="zh-TW" altLang="en-US" smtClean="0"/>
-              <a:t>2023/1/21</a:t>
+              <a:t>2025/2/7</a:t>
             </a:fld>
             <a:endParaRPr lang="zh-TW" altLang="en-US"/>
           </a:p>
@@ -566,10 +562,9 @@
           <a:lstStyle/>
           <a:p>
             <a:r>
-              <a:rPr lang="zh-TW" altLang="en-US" smtClean="0"/>
+              <a:rPr lang="zh-TW" altLang="en-US"/>
               <a:t>按一下以編輯母片標題樣式</a:t>
             </a:r>
-            <a:endParaRPr lang="zh-TW" altLang="en-US"/>
           </a:p>
         </p:txBody>
       </p:sp>
@@ -595,38 +590,37 @@
           <a:p>
             <a:pPr lvl="0"/>
             <a:r>
-              <a:rPr lang="zh-TW" altLang="en-US" smtClean="0"/>
+              <a:rPr lang="zh-TW" altLang="en-US"/>
               <a:t>按一下以編輯母片文字樣式</a:t>
             </a:r>
           </a:p>
           <a:p>
             <a:pPr lvl="1"/>
             <a:r>
-              <a:rPr lang="zh-TW" altLang="en-US" smtClean="0"/>
+              <a:rPr lang="zh-TW" altLang="en-US"/>
               <a:t>第二層</a:t>
             </a:r>
           </a:p>
           <a:p>
             <a:pPr lvl="2"/>
             <a:r>
-              <a:rPr lang="zh-TW" altLang="en-US" smtClean="0"/>
+              <a:rPr lang="zh-TW" altLang="en-US"/>
               <a:t>第三層</a:t>
             </a:r>
           </a:p>
           <a:p>
             <a:pPr lvl="3"/>
             <a:r>
-              <a:rPr lang="zh-TW" altLang="en-US" smtClean="0"/>
+              <a:rPr lang="zh-TW" altLang="en-US"/>
               <a:t>第四層</a:t>
             </a:r>
           </a:p>
           <a:p>
             <a:pPr lvl="4"/>
             <a:r>
-              <a:rPr lang="zh-TW" altLang="en-US" smtClean="0"/>
+              <a:rPr lang="zh-TW" altLang="en-US"/>
               <a:t>第五層</a:t>
             </a:r>
-            <a:endParaRPr lang="zh-TW" altLang="en-US"/>
           </a:p>
         </p:txBody>
       </p:sp>
@@ -647,7 +641,7 @@
           <a:p>
             <a:fld id="{DB277880-5CE5-494A-B90A-3AAA4EE77FE9}" type="datetimeFigureOut">
               <a:rPr lang="zh-TW" altLang="en-US" smtClean="0"/>
-              <a:t>2023/1/21</a:t>
+              <a:t>2025/2/7</a:t>
             </a:fld>
             <a:endParaRPr lang="zh-TW" altLang="en-US"/>
           </a:p>
@@ -736,10 +730,9 @@
           <a:lstStyle/>
           <a:p>
             <a:r>
-              <a:rPr lang="zh-TW" altLang="en-US" smtClean="0"/>
+              <a:rPr lang="zh-TW" altLang="en-US"/>
               <a:t>按一下以編輯母片標題樣式</a:t>
             </a:r>
-            <a:endParaRPr lang="zh-TW" altLang="en-US"/>
           </a:p>
         </p:txBody>
       </p:sp>
@@ -760,38 +753,37 @@
           <a:p>
             <a:pPr lvl="0"/>
             <a:r>
-              <a:rPr lang="zh-TW" altLang="en-US" smtClean="0"/>
+              <a:rPr lang="zh-TW" altLang="en-US"/>
               <a:t>按一下以編輯母片文字樣式</a:t>
             </a:r>
           </a:p>
           <a:p>
             <a:pPr lvl="1"/>
             <a:r>
-              <a:rPr lang="zh-TW" altLang="en-US" smtClean="0"/>
+              <a:rPr lang="zh-TW" altLang="en-US"/>
               <a:t>第二層</a:t>
             </a:r>
           </a:p>
           <a:p>
             <a:pPr lvl="2"/>
             <a:r>
-              <a:rPr lang="zh-TW" altLang="en-US" smtClean="0"/>
+              <a:rPr lang="zh-TW" altLang="en-US"/>
               <a:t>第三層</a:t>
             </a:r>
           </a:p>
           <a:p>
             <a:pPr lvl="3"/>
             <a:r>
-              <a:rPr lang="zh-TW" altLang="en-US" smtClean="0"/>
+              <a:rPr lang="zh-TW" altLang="en-US"/>
               <a:t>第四層</a:t>
             </a:r>
           </a:p>
           <a:p>
             <a:pPr lvl="4"/>
             <a:r>
-              <a:rPr lang="zh-TW" altLang="en-US" smtClean="0"/>
+              <a:rPr lang="zh-TW" altLang="en-US"/>
               <a:t>第五層</a:t>
             </a:r>
-            <a:endParaRPr lang="zh-TW" altLang="en-US"/>
           </a:p>
         </p:txBody>
       </p:sp>
@@ -812,7 +804,7 @@
           <a:p>
             <a:fld id="{DB277880-5CE5-494A-B90A-3AAA4EE77FE9}" type="datetimeFigureOut">
               <a:rPr lang="zh-TW" altLang="en-US" smtClean="0"/>
-              <a:t>2023/1/21</a:t>
+              <a:t>2025/2/7</a:t>
             </a:fld>
             <a:endParaRPr lang="zh-TW" altLang="en-US"/>
           </a:p>
@@ -910,10 +902,9 @@
           </a:lstStyle>
           <a:p>
             <a:r>
-              <a:rPr lang="zh-TW" altLang="en-US" smtClean="0"/>
+              <a:rPr lang="zh-TW" altLang="en-US"/>
               <a:t>按一下以編輯母片標題樣式</a:t>
             </a:r>
-            <a:endParaRPr lang="zh-TW" altLang="en-US"/>
           </a:p>
         </p:txBody>
       </p:sp>
@@ -1030,7 +1021,7 @@
           <a:p>
             <a:pPr lvl="0"/>
             <a:r>
-              <a:rPr lang="zh-TW" altLang="en-US" smtClean="0"/>
+              <a:rPr lang="zh-TW" altLang="en-US"/>
               <a:t>按一下以編輯母片文字樣式</a:t>
             </a:r>
           </a:p>
@@ -1053,7 +1044,7 @@
           <a:p>
             <a:fld id="{DB277880-5CE5-494A-B90A-3AAA4EE77FE9}" type="datetimeFigureOut">
               <a:rPr lang="zh-TW" altLang="en-US" smtClean="0"/>
-              <a:t>2023/1/21</a:t>
+              <a:t>2025/2/7</a:t>
             </a:fld>
             <a:endParaRPr lang="zh-TW" altLang="en-US"/>
           </a:p>
@@ -1142,10 +1133,9 @@
           <a:lstStyle/>
           <a:p>
             <a:r>
-              <a:rPr lang="zh-TW" altLang="en-US" smtClean="0"/>
+              <a:rPr lang="zh-TW" altLang="en-US"/>
               <a:t>按一下以編輯母片標題樣式</a:t>
             </a:r>
-            <a:endParaRPr lang="zh-TW" altLang="en-US"/>
           </a:p>
         </p:txBody>
       </p:sp>
@@ -1199,38 +1189,37 @@
           <a:p>
             <a:pPr lvl="0"/>
             <a:r>
-              <a:rPr lang="zh-TW" altLang="en-US" smtClean="0"/>
+              <a:rPr lang="zh-TW" altLang="en-US"/>
               <a:t>按一下以編輯母片文字樣式</a:t>
             </a:r>
           </a:p>
           <a:p>
             <a:pPr lvl="1"/>
             <a:r>
-              <a:rPr lang="zh-TW" altLang="en-US" smtClean="0"/>
+              <a:rPr lang="zh-TW" altLang="en-US"/>
               <a:t>第二層</a:t>
             </a:r>
           </a:p>
           <a:p>
             <a:pPr lvl="2"/>
             <a:r>
-              <a:rPr lang="zh-TW" altLang="en-US" smtClean="0"/>
+              <a:rPr lang="zh-TW" altLang="en-US"/>
               <a:t>第三層</a:t>
             </a:r>
           </a:p>
           <a:p>
             <a:pPr lvl="3"/>
             <a:r>
-              <a:rPr lang="zh-TW" altLang="en-US" smtClean="0"/>
+              <a:rPr lang="zh-TW" altLang="en-US"/>
               <a:t>第四層</a:t>
             </a:r>
           </a:p>
           <a:p>
             <a:pPr lvl="4"/>
             <a:r>
-              <a:rPr lang="zh-TW" altLang="en-US" smtClean="0"/>
+              <a:rPr lang="zh-TW" altLang="en-US"/>
               <a:t>第五層</a:t>
             </a:r>
-            <a:endParaRPr lang="zh-TW" altLang="en-US"/>
           </a:p>
         </p:txBody>
       </p:sp>
@@ -1284,38 +1273,37 @@
           <a:p>
             <a:pPr lvl="0"/>
             <a:r>
-              <a:rPr lang="zh-TW" altLang="en-US" smtClean="0"/>
+              <a:rPr lang="zh-TW" altLang="en-US"/>
               <a:t>按一下以編輯母片文字樣式</a:t>
             </a:r>
           </a:p>
           <a:p>
             <a:pPr lvl="1"/>
             <a:r>
-              <a:rPr lang="zh-TW" altLang="en-US" smtClean="0"/>
+              <a:rPr lang="zh-TW" altLang="en-US"/>
               <a:t>第二層</a:t>
             </a:r>
           </a:p>
           <a:p>
             <a:pPr lvl="2"/>
             <a:r>
-              <a:rPr lang="zh-TW" altLang="en-US" smtClean="0"/>
+              <a:rPr lang="zh-TW" altLang="en-US"/>
               <a:t>第三層</a:t>
             </a:r>
           </a:p>
           <a:p>
             <a:pPr lvl="3"/>
             <a:r>
-              <a:rPr lang="zh-TW" altLang="en-US" smtClean="0"/>
+              <a:rPr lang="zh-TW" altLang="en-US"/>
               <a:t>第四層</a:t>
             </a:r>
           </a:p>
           <a:p>
             <a:pPr lvl="4"/>
             <a:r>
-              <a:rPr lang="zh-TW" altLang="en-US" smtClean="0"/>
+              <a:rPr lang="zh-TW" altLang="en-US"/>
               <a:t>第五層</a:t>
             </a:r>
-            <a:endParaRPr lang="zh-TW" altLang="en-US"/>
           </a:p>
         </p:txBody>
       </p:sp>
@@ -1336,7 +1324,7 @@
           <a:p>
             <a:fld id="{DB277880-5CE5-494A-B90A-3AAA4EE77FE9}" type="datetimeFigureOut">
               <a:rPr lang="zh-TW" altLang="en-US" smtClean="0"/>
-              <a:t>2023/1/21</a:t>
+              <a:t>2025/2/7</a:t>
             </a:fld>
             <a:endParaRPr lang="zh-TW" altLang="en-US"/>
           </a:p>
@@ -1429,10 +1417,9 @@
           </a:lstStyle>
           <a:p>
             <a:r>
-              <a:rPr lang="zh-TW" altLang="en-US" smtClean="0"/>
+              <a:rPr lang="zh-TW" altLang="en-US"/>
               <a:t>按一下以編輯母片標題樣式</a:t>
             </a:r>
-            <a:endParaRPr lang="zh-TW" altLang="en-US"/>
           </a:p>
         </p:txBody>
       </p:sp>
@@ -1495,7 +1482,7 @@
           <a:p>
             <a:pPr lvl="0"/>
             <a:r>
-              <a:rPr lang="zh-TW" altLang="en-US" smtClean="0"/>
+              <a:rPr lang="zh-TW" altLang="en-US"/>
               <a:t>按一下以編輯母片文字樣式</a:t>
             </a:r>
           </a:p>
@@ -1551,38 +1538,37 @@
           <a:p>
             <a:pPr lvl="0"/>
             <a:r>
-              <a:rPr lang="zh-TW" altLang="en-US" smtClean="0"/>
+              <a:rPr lang="zh-TW" altLang="en-US"/>
               <a:t>按一下以編輯母片文字樣式</a:t>
             </a:r>
           </a:p>
           <a:p>
             <a:pPr lvl="1"/>
             <a:r>
-              <a:rPr lang="zh-TW" altLang="en-US" smtClean="0"/>
+              <a:rPr lang="zh-TW" altLang="en-US"/>
               <a:t>第二層</a:t>
             </a:r>
           </a:p>
           <a:p>
             <a:pPr lvl="2"/>
             <a:r>
-              <a:rPr lang="zh-TW" altLang="en-US" smtClean="0"/>
+              <a:rPr lang="zh-TW" altLang="en-US"/>
               <a:t>第三層</a:t>
             </a:r>
           </a:p>
           <a:p>
             <a:pPr lvl="3"/>
             <a:r>
-              <a:rPr lang="zh-TW" altLang="en-US" smtClean="0"/>
+              <a:rPr lang="zh-TW" altLang="en-US"/>
               <a:t>第四層</a:t>
             </a:r>
           </a:p>
           <a:p>
             <a:pPr lvl="4"/>
             <a:r>
-              <a:rPr lang="zh-TW" altLang="en-US" smtClean="0"/>
+              <a:rPr lang="zh-TW" altLang="en-US"/>
               <a:t>第五層</a:t>
             </a:r>
-            <a:endParaRPr lang="zh-TW" altLang="en-US"/>
           </a:p>
         </p:txBody>
       </p:sp>
@@ -1645,7 +1631,7 @@
           <a:p>
             <a:pPr lvl="0"/>
             <a:r>
-              <a:rPr lang="zh-TW" altLang="en-US" smtClean="0"/>
+              <a:rPr lang="zh-TW" altLang="en-US"/>
               <a:t>按一下以編輯母片文字樣式</a:t>
             </a:r>
           </a:p>
@@ -1701,38 +1687,37 @@
           <a:p>
             <a:pPr lvl="0"/>
             <a:r>
-              <a:rPr lang="zh-TW" altLang="en-US" smtClean="0"/>
+              <a:rPr lang="zh-TW" altLang="en-US"/>
               <a:t>按一下以編輯母片文字樣式</a:t>
             </a:r>
           </a:p>
           <a:p>
             <a:pPr lvl="1"/>
             <a:r>
-              <a:rPr lang="zh-TW" altLang="en-US" smtClean="0"/>
+              <a:rPr lang="zh-TW" altLang="en-US"/>
               <a:t>第二層</a:t>
             </a:r>
           </a:p>
           <a:p>
             <a:pPr lvl="2"/>
             <a:r>
-              <a:rPr lang="zh-TW" altLang="en-US" smtClean="0"/>
+              <a:rPr lang="zh-TW" altLang="en-US"/>
               <a:t>第三層</a:t>
             </a:r>
           </a:p>
           <a:p>
             <a:pPr lvl="3"/>
             <a:r>
-              <a:rPr lang="zh-TW" altLang="en-US" smtClean="0"/>
+              <a:rPr lang="zh-TW" altLang="en-US"/>
               <a:t>第四層</a:t>
             </a:r>
           </a:p>
           <a:p>
             <a:pPr lvl="4"/>
             <a:r>
-              <a:rPr lang="zh-TW" altLang="en-US" smtClean="0"/>
+              <a:rPr lang="zh-TW" altLang="en-US"/>
               <a:t>第五層</a:t>
             </a:r>
-            <a:endParaRPr lang="zh-TW" altLang="en-US"/>
           </a:p>
         </p:txBody>
       </p:sp>
@@ -1753,7 +1738,7 @@
           <a:p>
             <a:fld id="{DB277880-5CE5-494A-B90A-3AAA4EE77FE9}" type="datetimeFigureOut">
               <a:rPr lang="zh-TW" altLang="en-US" smtClean="0"/>
-              <a:t>2023/1/21</a:t>
+              <a:t>2025/2/7</a:t>
             </a:fld>
             <a:endParaRPr lang="zh-TW" altLang="en-US"/>
           </a:p>
@@ -1842,10 +1827,9 @@
           <a:lstStyle/>
           <a:p>
             <a:r>
-              <a:rPr lang="zh-TW" altLang="en-US" smtClean="0"/>
+              <a:rPr lang="zh-TW" altLang="en-US"/>
               <a:t>按一下以編輯母片標題樣式</a:t>
             </a:r>
-            <a:endParaRPr lang="zh-TW" altLang="en-US"/>
           </a:p>
         </p:txBody>
       </p:sp>
@@ -1866,7 +1850,7 @@
           <a:p>
             <a:fld id="{DB277880-5CE5-494A-B90A-3AAA4EE77FE9}" type="datetimeFigureOut">
               <a:rPr lang="zh-TW" altLang="en-US" smtClean="0"/>
-              <a:t>2023/1/21</a:t>
+              <a:t>2025/2/7</a:t>
             </a:fld>
             <a:endParaRPr lang="zh-TW" altLang="en-US"/>
           </a:p>
@@ -1956,7 +1940,7 @@
           <a:p>
             <a:fld id="{DB277880-5CE5-494A-B90A-3AAA4EE77FE9}" type="datetimeFigureOut">
               <a:rPr lang="zh-TW" altLang="en-US" smtClean="0"/>
-              <a:t>2023/1/21</a:t>
+              <a:t>2025/2/7</a:t>
             </a:fld>
             <a:endParaRPr lang="zh-TW" altLang="en-US"/>
           </a:p>
@@ -2054,10 +2038,9 @@
           </a:lstStyle>
           <a:p>
             <a:r>
-              <a:rPr lang="zh-TW" altLang="en-US" smtClean="0"/>
+              <a:rPr lang="zh-TW" altLang="en-US"/>
               <a:t>按一下以編輯母片標題樣式</a:t>
             </a:r>
-            <a:endParaRPr lang="zh-TW" altLang="en-US"/>
           </a:p>
         </p:txBody>
       </p:sp>
@@ -2111,38 +2094,37 @@
           <a:p>
             <a:pPr lvl="0"/>
             <a:r>
-              <a:rPr lang="zh-TW" altLang="en-US" smtClean="0"/>
+              <a:rPr lang="zh-TW" altLang="en-US"/>
               <a:t>按一下以編輯母片文字樣式</a:t>
             </a:r>
           </a:p>
           <a:p>
             <a:pPr lvl="1"/>
             <a:r>
-              <a:rPr lang="zh-TW" altLang="en-US" smtClean="0"/>
+              <a:rPr lang="zh-TW" altLang="en-US"/>
               <a:t>第二層</a:t>
             </a:r>
           </a:p>
           <a:p>
             <a:pPr lvl="2"/>
             <a:r>
-              <a:rPr lang="zh-TW" altLang="en-US" smtClean="0"/>
+              <a:rPr lang="zh-TW" altLang="en-US"/>
               <a:t>第三層</a:t>
             </a:r>
           </a:p>
           <a:p>
             <a:pPr lvl="3"/>
             <a:r>
-              <a:rPr lang="zh-TW" altLang="en-US" smtClean="0"/>
+              <a:rPr lang="zh-TW" altLang="en-US"/>
               <a:t>第四層</a:t>
             </a:r>
           </a:p>
           <a:p>
             <a:pPr lvl="4"/>
             <a:r>
-              <a:rPr lang="zh-TW" altLang="en-US" smtClean="0"/>
+              <a:rPr lang="zh-TW" altLang="en-US"/>
               <a:t>第五層</a:t>
             </a:r>
-            <a:endParaRPr lang="zh-TW" altLang="en-US"/>
           </a:p>
         </p:txBody>
       </p:sp>
@@ -2205,7 +2187,7 @@
           <a:p>
             <a:pPr lvl="0"/>
             <a:r>
-              <a:rPr lang="zh-TW" altLang="en-US" smtClean="0"/>
+              <a:rPr lang="zh-TW" altLang="en-US"/>
               <a:t>按一下以編輯母片文字樣式</a:t>
             </a:r>
           </a:p>
@@ -2228,7 +2210,7 @@
           <a:p>
             <a:fld id="{DB277880-5CE5-494A-B90A-3AAA4EE77FE9}" type="datetimeFigureOut">
               <a:rPr lang="zh-TW" altLang="en-US" smtClean="0"/>
-              <a:t>2023/1/21</a:t>
+              <a:t>2025/2/7</a:t>
             </a:fld>
             <a:endParaRPr lang="zh-TW" altLang="en-US"/>
           </a:p>
@@ -2326,10 +2308,9 @@
           </a:lstStyle>
           <a:p>
             <a:r>
-              <a:rPr lang="zh-TW" altLang="en-US" smtClean="0"/>
+              <a:rPr lang="zh-TW" altLang="en-US"/>
               <a:t>按一下以編輯母片標題樣式</a:t>
             </a:r>
-            <a:endParaRPr lang="zh-TW" altLang="en-US"/>
           </a:p>
         </p:txBody>
       </p:sp>
@@ -2391,10 +2372,9 @@
           </a:lstStyle>
           <a:p>
             <a:r>
-              <a:rPr lang="zh-TW" altLang="en-US" smtClean="0"/>
+              <a:rPr lang="zh-TW" altLang="en-US"/>
               <a:t>按一下圖示以新增圖片</a:t>
             </a:r>
-            <a:endParaRPr lang="zh-TW" altLang="en-US"/>
           </a:p>
         </p:txBody>
       </p:sp>
@@ -2457,7 +2437,7 @@
           <a:p>
             <a:pPr lvl="0"/>
             <a:r>
-              <a:rPr lang="zh-TW" altLang="en-US" smtClean="0"/>
+              <a:rPr lang="zh-TW" altLang="en-US"/>
               <a:t>按一下以編輯母片文字樣式</a:t>
             </a:r>
           </a:p>
@@ -2480,7 +2460,7 @@
           <a:p>
             <a:fld id="{DB277880-5CE5-494A-B90A-3AAA4EE77FE9}" type="datetimeFigureOut">
               <a:rPr lang="zh-TW" altLang="en-US" smtClean="0"/>
-              <a:t>2023/1/21</a:t>
+              <a:t>2025/2/7</a:t>
             </a:fld>
             <a:endParaRPr lang="zh-TW" altLang="en-US"/>
           </a:p>
@@ -2589,10 +2569,9 @@
           <a:lstStyle/>
           <a:p>
             <a:r>
-              <a:rPr lang="zh-TW" altLang="en-US" smtClean="0"/>
+              <a:rPr lang="zh-TW" altLang="en-US"/>
               <a:t>按一下以編輯母片標題樣式</a:t>
             </a:r>
-            <a:endParaRPr lang="zh-TW" altLang="en-US"/>
           </a:p>
         </p:txBody>
       </p:sp>
@@ -2623,38 +2602,37 @@
           <a:p>
             <a:pPr lvl="0"/>
             <a:r>
-              <a:rPr lang="zh-TW" altLang="en-US" smtClean="0"/>
+              <a:rPr lang="zh-TW" altLang="en-US"/>
               <a:t>按一下以編輯母片文字樣式</a:t>
             </a:r>
           </a:p>
           <a:p>
             <a:pPr lvl="1"/>
             <a:r>
-              <a:rPr lang="zh-TW" altLang="en-US" smtClean="0"/>
+              <a:rPr lang="zh-TW" altLang="en-US"/>
               <a:t>第二層</a:t>
             </a:r>
           </a:p>
           <a:p>
             <a:pPr lvl="2"/>
             <a:r>
-              <a:rPr lang="zh-TW" altLang="en-US" smtClean="0"/>
+              <a:rPr lang="zh-TW" altLang="en-US"/>
               <a:t>第三層</a:t>
             </a:r>
           </a:p>
           <a:p>
             <a:pPr lvl="3"/>
             <a:r>
-              <a:rPr lang="zh-TW" altLang="en-US" smtClean="0"/>
+              <a:rPr lang="zh-TW" altLang="en-US"/>
               <a:t>第四層</a:t>
             </a:r>
           </a:p>
           <a:p>
             <a:pPr lvl="4"/>
             <a:r>
-              <a:rPr lang="zh-TW" altLang="en-US" smtClean="0"/>
+              <a:rPr lang="zh-TW" altLang="en-US"/>
               <a:t>第五層</a:t>
             </a:r>
-            <a:endParaRPr lang="zh-TW" altLang="en-US"/>
           </a:p>
         </p:txBody>
       </p:sp>
@@ -2693,7 +2671,7 @@
           <a:p>
             <a:fld id="{DB277880-5CE5-494A-B90A-3AAA4EE77FE9}" type="datetimeFigureOut">
               <a:rPr lang="zh-TW" altLang="en-US" smtClean="0"/>
-              <a:t>2023/1/21</a:t>
+              <a:t>2025/2/7</a:t>
             </a:fld>
             <a:endParaRPr lang="zh-TW" altLang="en-US"/>
           </a:p>
@@ -3100,24 +3078,7 @@
                 <a:latin typeface="微軟正黑體" pitchFamily="34" charset="-120"/>
                 <a:ea typeface="微軟正黑體" pitchFamily="34" charset="-120"/>
               </a:rPr>
-              <a:t>賜</a:t>
-            </a:r>
-            <a:r>
-              <a:rPr lang="zh-TW" altLang="en-US" sz="7200" b="1" i="1" dirty="0">
-                <a:solidFill>
-                  <a:srgbClr val="660033"/>
-                </a:solidFill>
-                <a:effectLst>
-                  <a:outerShdw blurRad="38100" dist="38100" dir="2700000" algn="tl">
-                    <a:srgbClr val="000000">
-                      <a:alpha val="43137"/>
-                    </a:srgbClr>
-                  </a:outerShdw>
-                </a:effectLst>
-                <a:latin typeface="微軟正黑體" pitchFamily="34" charset="-120"/>
-                <a:ea typeface="微軟正黑體" pitchFamily="34" charset="-120"/>
-              </a:rPr>
-              <a:t>福與你</a:t>
+              <a:t>賜福與你</a:t>
             </a:r>
           </a:p>
         </p:txBody>
@@ -3260,7 +3221,7 @@
                 <a:latin typeface="Microsoft JhengHei" panose="020B0604030504040204" pitchFamily="34" charset="-120"/>
                 <a:ea typeface="Microsoft JhengHei" panose="020B0604030504040204" pitchFamily="34" charset="-120"/>
               </a:rPr>
-              <a:t>正</a:t>
+              <a:t>正歌</a:t>
             </a:r>
             <a:r>
               <a:rPr lang="en-US" sz="3733" b="1" dirty="0">
@@ -3368,13 +3329,6 @@
               </a:rPr>
               <a:t>平安喜樂天天充滿你</a:t>
             </a:r>
-            <a:endParaRPr lang="zh-TW" altLang="en-US" sz="6400" b="1" dirty="0">
-              <a:solidFill>
-                <a:srgbClr val="660033"/>
-              </a:solidFill>
-              <a:latin typeface="微軟正黑體" pitchFamily="34" charset="-120"/>
-              <a:ea typeface="微軟正黑體" pitchFamily="34" charset="-120"/>
-            </a:endParaRPr>
           </a:p>
         </p:txBody>
       </p:sp>
@@ -3419,7 +3373,7 @@
                 <a:latin typeface="Microsoft JhengHei" panose="020B0604030504040204" pitchFamily="34" charset="-120"/>
                 <a:ea typeface="Microsoft JhengHei" panose="020B0604030504040204" pitchFamily="34" charset="-120"/>
               </a:rPr>
-              <a:t>正</a:t>
+              <a:t>正歌</a:t>
             </a:r>
             <a:r>
               <a:rPr lang="en-US" sz="3733" b="1" dirty="0">
@@ -3578,17 +3532,57 @@
                 <a:latin typeface="Microsoft JhengHei" panose="020B0604030504040204" pitchFamily="34" charset="-120"/>
                 <a:ea typeface="Microsoft JhengHei" panose="020B0604030504040204" pitchFamily="34" charset="-120"/>
               </a:rPr>
-              <a:t>副</a:t>
-            </a:r>
-            <a:r>
-              <a:rPr lang="en-US" sz="3733" b="1" dirty="0">
+              <a:t>副歌</a:t>
+            </a:r>
+            <a:r>
+              <a:rPr lang="en-US" sz="3733" b="1">
                 <a:solidFill>
                   <a:srgbClr val="660033"/>
                 </a:solidFill>
                 <a:latin typeface="Microsoft JhengHei" panose="020B0604030504040204" pitchFamily="34" charset="-120"/>
                 <a:ea typeface="Microsoft JhengHei" panose="020B0604030504040204" pitchFamily="34" charset="-120"/>
               </a:rPr>
-              <a:t> ) ( x2 )</a:t>
+              <a:t> </a:t>
+            </a:r>
+            <a:r>
+              <a:rPr lang="en-US" sz="3733" b="1" dirty="0">
+                <a:solidFill>
+                  <a:srgbClr val="660033"/>
+                </a:solidFill>
+                <a:latin typeface="Microsoft JhengHei" panose="020B0604030504040204" pitchFamily="34" charset="-120"/>
+                <a:ea typeface="Microsoft JhengHei" panose="020B0604030504040204" pitchFamily="34" charset="-120"/>
+              </a:rPr>
+              <a:t>) </a:t>
+            </a:r>
+            <a:r>
+              <a:rPr lang="en-US" sz="3733" b="1">
+                <a:solidFill>
+                  <a:srgbClr val="660033"/>
+                </a:solidFill>
+                <a:latin typeface="Microsoft JhengHei" panose="020B0604030504040204" pitchFamily="34" charset="-120"/>
+                <a:ea typeface="Microsoft JhengHei" panose="020B0604030504040204" pitchFamily="34" charset="-120"/>
+              </a:rPr>
+              <a:t>( 2</a:t>
+            </a:r>
+            <a:r>
+              <a:rPr lang="zh-CN" altLang="en-US" sz="3733" b="1" dirty="0">
+                <a:solidFill>
+                  <a:srgbClr val="660033"/>
+                </a:solidFill>
+                <a:latin typeface="Microsoft JhengHei" panose="020B0604030504040204" pitchFamily="34" charset="-120"/>
+                <a:ea typeface="Microsoft JhengHei" panose="020B0604030504040204" pitchFamily="34" charset="-120"/>
+              </a:rPr>
+              <a:t>次</a:t>
+            </a:r>
+            <a:r>
+              <a:rPr lang="en-US" sz="3733" b="1" dirty="0">
+                <a:solidFill>
+                  <a:srgbClr val="660033"/>
+                </a:solidFill>
+                <a:latin typeface="Microsoft JhengHei" panose="020B0604030504040204" pitchFamily="34" charset="-120"/>
+                <a:ea typeface="Microsoft JhengHei" panose="020B0604030504040204" pitchFamily="34" charset="-120"/>
+              </a:rPr>
+              <a:t> )</a:t>
             </a:r>
             <a:endParaRPr lang="vi-VN" sz="3733" b="1" dirty="0">
               <a:solidFill>
